--- a/docs/submission/05-项目的详细分工及过程-演示稿.pptx
+++ b/docs/submission/05-项目的详细分工及过程-演示稿.pptx
@@ -24,9 +24,10 @@
     <p:sldId id="272" r:id="rId18"/>
     <p:sldId id="273" r:id="rId19"/>
     <p:sldId id="274" r:id="rId20"/>
+    <p:sldId id="275" r:id="rId21"/>
   </p:sldIdLst>
   <p:notesMasterIdLst>
-    <p:notesMasterId r:id="rId21"/>
+    <p:notesMasterId r:id="rId22"/>
   </p:notesMasterIdLst>
   <p:sldSz cx="12192000" cy="6858000"/>
   <p:notesSz cx="6858000" cy="12192000"/>
@@ -1512,6 +1513,94 @@
             <a:fld id="{F7021451-1387-4CA6-816F-3879F97B5CBC}" type="slidenum">
               <a:rPr lang="en-US"/>
               <a:t>2</a:t>
+            </a:fld>
+            <a:endParaRPr lang="en-US"/>
+          </a:p>
+        </p:txBody>
+      </p:sp>
+    </p:spTree>
+    <p:extLst>
+      <p:ext uri="{BB962C8B-B14F-4D97-AF65-F5344CB8AC3E}">
+        <p14:creationId xmlns:p14="http://schemas.microsoft.com/office/powerpoint/2010/main" val="1024086991"/>
+      </p:ext>
+    </p:extLst>
+  </p:cSld>
+  <p:clrMapOvr>
+    <a:masterClrMapping/>
+  </p:clrMapOvr>
+</p:notes>
+</file>
+
+<file path=ppt/notesSlides/notesSlide20.xml><?xml version="1.0" encoding="utf-8"?>
+<p:notes xmlns:a="http://schemas.openxmlformats.org/drawingml/2006/main" xmlns:r="http://schemas.openxmlformats.org/officeDocument/2006/relationships" xmlns:p="http://schemas.openxmlformats.org/presentationml/2006/main">
+  <p:cSld>
+    <p:spTree>
+      <p:nvGrpSpPr>
+        <p:cNvPr id="1" name=""/>
+        <p:cNvGrpSpPr/>
+        <p:nvPr/>
+      </p:nvGrpSpPr>
+      <p:grpSpPr>
+        <a:xfrm>
+          <a:off x="0" y="0"/>
+          <a:ext cx="0" cy="0"/>
+          <a:chOff x="0" y="0"/>
+          <a:chExt cx="0" cy="0"/>
+        </a:xfrm>
+      </p:grpSpPr>
+      <p:sp>
+        <p:nvSpPr>
+          <p:cNvPr id="2" name="Slide Image Placeholder 1"/>
+          <p:cNvSpPr>
+            <a:spLocks noGrp="1" noRot="1" noChangeAspect="1"/>
+          </p:cNvSpPr>
+          <p:nvPr>
+            <p:ph type="sldImg"/>
+          </p:nvPr>
+        </p:nvSpPr>
+        <p:spPr/>
+      </p:sp>
+      <p:sp>
+        <p:nvSpPr>
+          <p:cNvPr id="3" name="Notes Placeholder 2"/>
+          <p:cNvSpPr>
+            <a:spLocks noGrp="1"/>
+          </p:cNvSpPr>
+          <p:nvPr>
+            <p:ph type="body" idx="1"/>
+          </p:nvPr>
+        </p:nvSpPr>
+        <p:spPr/>
+        <p:txBody>
+          <a:bodyPr/>
+          <a:lstStyle/>
+          <a:p>
+            <a:r>
+              <a:rPr lang="en-US" dirty="0"/>
+              <a:t/>
+            </a:r>
+            <a:endParaRPr lang="en-US" dirty="0"/>
+          </a:p>
+        </p:txBody>
+      </p:sp>
+      <p:sp>
+        <p:nvSpPr>
+          <p:cNvPr id="4" name="Slide Number Placeholder 3"/>
+          <p:cNvSpPr>
+            <a:spLocks noGrp="1"/>
+          </p:cNvSpPr>
+          <p:nvPr>
+            <p:ph type="sldNum" sz="quarter" idx="10"/>
+          </p:nvPr>
+        </p:nvSpPr>
+        <p:spPr/>
+        <p:txBody>
+          <a:bodyPr/>
+          <a:lstStyle/>
+          <a:p>
+            <a:fld id="{F7021451-1387-4CA6-816F-3879F97B5CBC}" type="slidenum">
+              <a:rPr lang="en-US"/>
+              <a:t>20</a:t>
             </a:fld>
             <a:endParaRPr lang="en-US"/>
           </a:p>
@@ -11715,7 +11804,7 @@
                           <a:ea typeface="Microsoft YaHei" pitchFamily="34" charset="-122"/>
                           <a:cs typeface="Microsoft YaHei" pitchFamily="34" charset="-120"/>
                         </a:rPr>
-                        <a:t>后端开发 A 主导</a:t>
+                        <a:t>小丁主导</a:t>
                       </a:r>
                       <a:endParaRPr lang="en-US" sz="950" dirty="0">
                         <a:latin typeface="Microsoft YaHei" charset="0"/>
@@ -12096,7 +12185,7 @@
                           <a:ea typeface="Microsoft YaHei" pitchFamily="34" charset="-122"/>
                           <a:cs typeface="Microsoft YaHei" pitchFamily="34" charset="-120"/>
                         </a:rPr>
-                        <a:t>AI 评估与报告生成</a:t>
+                        <a:t>小黄，全队审定</a:t>
                       </a:r>
                       <a:endParaRPr lang="en-US" sz="950" dirty="0">
                         <a:latin typeface="Microsoft YaHei" charset="0"/>
@@ -12869,7 +12958,7 @@
                           <a:ea typeface="Microsoft YaHei" pitchFamily="34" charset="-122"/>
                           <a:cs typeface="Microsoft YaHei" pitchFamily="34" charset="-120"/>
                         </a:rPr>
-                        <a:t>后端开发 A</a:t>
+                        <a:t>小丁</a:t>
                       </a:r>
                       <a:endParaRPr lang="en-US" sz="950" dirty="0">
                         <a:latin typeface="Microsoft YaHei" charset="0"/>
@@ -13250,7 +13339,7 @@
                           <a:ea typeface="Microsoft YaHei" pitchFamily="34" charset="-122"/>
                           <a:cs typeface="Microsoft YaHei" pitchFamily="34" charset="-120"/>
                         </a:rPr>
-                        <a:t>AI 评估与报告生成</a:t>
+                        <a:t>小黄</a:t>
                       </a:r>
                       <a:endParaRPr lang="en-US" sz="950" dirty="0">
                         <a:latin typeface="Microsoft YaHei" charset="0"/>
@@ -13631,7 +13720,7 @@
                           <a:ea typeface="Microsoft YaHei" pitchFamily="34" charset="-122"/>
                           <a:cs typeface="Microsoft YaHei" pitchFamily="34" charset="-120"/>
                         </a:rPr>
-                        <a:t>知识库构建与测试、对话层</a:t>
+                        <a:t>小李、小陈</a:t>
                       </a:r>
                       <a:endParaRPr lang="en-US" sz="950" dirty="0">
                         <a:latin typeface="Microsoft YaHei" charset="0"/>
@@ -14012,7 +14101,7 @@
                           <a:ea typeface="Microsoft YaHei" pitchFamily="34" charset="-122"/>
                           <a:cs typeface="Microsoft YaHei" pitchFamily="34" charset="-120"/>
                         </a:rPr>
-                        <a:t>后端开发 A</a:t>
+                        <a:t>小丁</a:t>
                       </a:r>
                       <a:endParaRPr lang="en-US" sz="950" dirty="0">
                         <a:latin typeface="Microsoft YaHei" charset="0"/>
@@ -15496,7 +15585,7 @@
                           <a:ea typeface="Microsoft YaHei" pitchFamily="34" charset="-122"/>
                           <a:cs typeface="Microsoft YaHei" pitchFamily="34" charset="-120"/>
                         </a:rPr>
-                        <a:t>后端开发 A</a:t>
+                        <a:t>小丁</a:t>
                       </a:r>
                       <a:endParaRPr lang="en-US" sz="950" dirty="0">
                         <a:latin typeface="Microsoft YaHei" charset="0"/>
@@ -15877,7 +15966,7 @@
                           <a:ea typeface="Microsoft YaHei" pitchFamily="34" charset="-122"/>
                           <a:cs typeface="Microsoft YaHei" pitchFamily="34" charset="-120"/>
                         </a:rPr>
-                        <a:t>后端开发 A</a:t>
+                        <a:t>小丁</a:t>
                       </a:r>
                       <a:endParaRPr lang="en-US" sz="950" dirty="0">
                         <a:latin typeface="Microsoft YaHei" charset="0"/>
@@ -16258,7 +16347,7 @@
                           <a:ea typeface="Microsoft YaHei" pitchFamily="34" charset="-122"/>
                           <a:cs typeface="Microsoft YaHei" pitchFamily="34" charset="-120"/>
                         </a:rPr>
-                        <a:t>对话层、后端开发 A</a:t>
+                        <a:t>小陈、小丁</a:t>
                       </a:r>
                       <a:endParaRPr lang="en-US" sz="950" dirty="0">
                         <a:latin typeface="Microsoft YaHei" charset="0"/>
@@ -16639,7 +16728,7 @@
                           <a:ea typeface="Microsoft YaHei" pitchFamily="34" charset="-122"/>
                           <a:cs typeface="Microsoft YaHei" pitchFamily="34" charset="-120"/>
                         </a:rPr>
-                        <a:t>前端全栈开发</a:t>
+                        <a:t>小冯</a:t>
                       </a:r>
                       <a:endParaRPr lang="en-US" sz="950" dirty="0">
                         <a:latin typeface="Microsoft YaHei" charset="0"/>
@@ -17031,7 +17120,7 @@
                           <a:ea typeface="Microsoft YaHei" pitchFamily="34" charset="-122"/>
                           <a:cs typeface="Microsoft YaHei" pitchFamily="34" charset="-120"/>
                         </a:rPr>
-                        <a:t>后端开发 A</a:t>
+                        <a:t>小丁</a:t>
                       </a:r>
                       <a:endParaRPr lang="en-US" sz="950" dirty="0">
                         <a:latin typeface="Microsoft YaHei" charset="0"/>
@@ -17412,7 +17501,7 @@
                           <a:ea typeface="Microsoft YaHei" pitchFamily="34" charset="-122"/>
                           <a:cs typeface="Microsoft YaHei" pitchFamily="34" charset="-120"/>
                         </a:rPr>
-                        <a:t>后端开发 A</a:t>
+                        <a:t>小丁</a:t>
                       </a:r>
                       <a:endParaRPr lang="en-US" sz="950" dirty="0">
                         <a:latin typeface="Microsoft YaHei" charset="0"/>
@@ -17793,7 +17882,7 @@
                           <a:ea typeface="Microsoft YaHei" pitchFamily="34" charset="-122"/>
                           <a:cs typeface="Microsoft YaHei" pitchFamily="34" charset="-120"/>
                         </a:rPr>
-                        <a:t>全队（评估岗统筹）</a:t>
+                        <a:t>全队（小黄统筹）</a:t>
                       </a:r>
                       <a:endParaRPr lang="en-US" sz="950" dirty="0">
                         <a:latin typeface="Microsoft YaHei" charset="0"/>
@@ -17964,7 +18053,7 @@
     <p:bg>
       <p:bgPr>
         <a:solidFill>
-          <a:srgbClr val="1E1E1E"/>
+          <a:srgbClr val="FFFFFF"/>
         </a:solidFill>
       </p:bgPr>
     </p:bg>
@@ -17990,14 +18079,14 @@
         </p:nvSpPr>
         <p:spPr>
           <a:xfrm>
-            <a:off x="0" y="3410712"/>
-            <a:ext cx="12191695" cy="36576"/>
+            <a:off x="0" y="0"/>
+            <a:ext cx="12191695" cy="868680"/>
           </a:xfrm>
           <a:prstGeom prst="rect">
             <a:avLst/>
           </a:prstGeom>
           <a:solidFill>
-            <a:srgbClr val="2B2F36"/>
+            <a:srgbClr val="1E1E1E"/>
           </a:solidFill>
           <a:ln/>
         </p:spPr>
@@ -18010,8 +18099,8 @@
         </p:nvSpPr>
         <p:spPr>
           <a:xfrm>
-            <a:off x="822960" y="1965960"/>
-            <a:ext cx="777240" cy="82296"/>
+            <a:off x="0" y="0"/>
+            <a:ext cx="146304" cy="868680"/>
           </a:xfrm>
           <a:prstGeom prst="rect">
             <a:avLst/>
@@ -18024,34 +18113,259 @@
       </p:sp>
       <p:sp>
         <p:nvSpPr>
-          <p:cNvPr id="4" name="Shape 2"/>
-          <p:cNvSpPr/>
-          <p:nvPr/>
-        </p:nvSpPr>
-        <p:spPr>
-          <a:xfrm>
-            <a:off x="1737360" y="1965960"/>
-            <a:ext cx="457200" cy="82296"/>
-          </a:xfrm>
-          <a:prstGeom prst="rect">
-            <a:avLst/>
+          <p:cNvPr id="4" name="Text 2"/>
+          <p:cNvSpPr/>
+          <p:nvPr/>
+        </p:nvSpPr>
+        <p:spPr>
+          <a:xfrm>
+            <a:off x="475488" y="146304"/>
+            <a:ext cx="9326880" cy="576072"/>
+          </a:xfrm>
+          <a:prstGeom prst="rect">
+            <a:avLst/>
+          </a:prstGeom>
+          <a:noFill/>
+          <a:ln/>
+        </p:spPr>
+        <p:txBody>
+          <a:bodyPr wrap="square" lIns="0" tIns="0" rIns="0" bIns="0" rtlCol="0" anchor="ctr"/>
+          <a:lstStyle/>
+          <a:p>
+            <a:pPr indent="0" marL="0">
+              <a:buNone/>
+            </a:pPr>
+            <a:r>
+              <a:rPr lang="en-US" sz="2300" b="1" dirty="0">
+                <a:solidFill>
+                  <a:srgbClr val="FFFFFF"/>
+                </a:solidFill>
+                <a:latin typeface="Microsoft YaHei" pitchFamily="34" charset="0"/>
+                <a:ea typeface="Microsoft YaHei" pitchFamily="34" charset="-122"/>
+                <a:cs typeface="Microsoft YaHei" pitchFamily="34" charset="-120"/>
+              </a:rPr>
+              <a:t>团队协作纪实</a:t>
+            </a:r>
+            <a:endParaRPr lang="en-US" sz="2300" dirty="0"/>
+          </a:p>
+        </p:txBody>
+      </p:sp>
+      <p:sp>
+        <p:nvSpPr>
+          <p:cNvPr id="5" name="Text 3"/>
+          <p:cNvSpPr/>
+          <p:nvPr/>
+        </p:nvSpPr>
+        <p:spPr>
+          <a:xfrm>
+            <a:off x="10058400" y="182880"/>
+            <a:ext cx="1737360" cy="502920"/>
+          </a:xfrm>
+          <a:prstGeom prst="rect">
+            <a:avLst/>
+          </a:prstGeom>
+          <a:noFill/>
+          <a:ln/>
+        </p:spPr>
+        <p:txBody>
+          <a:bodyPr wrap="square" lIns="0" tIns="0" rIns="0" bIns="0" rtlCol="0" anchor="ctr"/>
+          <a:lstStyle/>
+          <a:p>
+            <a:pPr algn="r" indent="0" marL="0">
+              <a:buNone/>
+            </a:pPr>
+            <a:r>
+              <a:rPr lang="en-US" sz="1100" dirty="0">
+                <a:solidFill>
+                  <a:srgbClr val="00FFFF"/>
+                </a:solidFill>
+                <a:latin typeface="Microsoft YaHei" pitchFamily="34" charset="0"/>
+                <a:ea typeface="Microsoft YaHei" pitchFamily="34" charset="-122"/>
+                <a:cs typeface="Microsoft YaHei" pitchFamily="34" charset="-120"/>
+              </a:rPr>
+              <a:t>协作痕迹</a:t>
+            </a:r>
+            <a:endParaRPr lang="en-US" sz="1100" dirty="0"/>
+          </a:p>
+        </p:txBody>
+      </p:sp>
+      <p:sp>
+        <p:nvSpPr>
+          <p:cNvPr id="6" name="Text 4"/>
+          <p:cNvSpPr/>
+          <p:nvPr/>
+        </p:nvSpPr>
+        <p:spPr>
+          <a:xfrm>
+            <a:off x="475488" y="6437376"/>
+            <a:ext cx="4572000" cy="274320"/>
+          </a:xfrm>
+          <a:prstGeom prst="rect">
+            <a:avLst/>
+          </a:prstGeom>
+          <a:noFill/>
+          <a:ln/>
+        </p:spPr>
+        <p:txBody>
+          <a:bodyPr wrap="square" lIns="0" tIns="0" rIns="0" bIns="0" rtlCol="0" anchor="ctr"/>
+          <a:lstStyle/>
+          <a:p>
+            <a:pPr indent="0" marL="0">
+              <a:buNone/>
+            </a:pPr>
+            <a:r>
+              <a:rPr lang="en-US" sz="950" dirty="0">
+                <a:solidFill>
+                  <a:srgbClr val="98A2B3"/>
+                </a:solidFill>
+                <a:latin typeface="Microsoft YaHei" pitchFamily="34" charset="0"/>
+                <a:ea typeface="Microsoft YaHei" pitchFamily="34" charset="-122"/>
+                <a:cs typeface="Microsoft YaHei" pitchFamily="34" charset="-120"/>
+              </a:rPr>
+              <a:t>深镜智聘 · Alpha 小队</a:t>
+            </a:r>
+            <a:endParaRPr lang="en-US" sz="950" dirty="0"/>
+          </a:p>
+        </p:txBody>
+      </p:sp>
+      <p:sp>
+        <p:nvSpPr>
+          <p:cNvPr id="7" name="Text 5"/>
+          <p:cNvSpPr/>
+          <p:nvPr/>
+        </p:nvSpPr>
+        <p:spPr>
+          <a:xfrm>
+            <a:off x="11140135" y="6437376"/>
+            <a:ext cx="576072" cy="274320"/>
+          </a:xfrm>
+          <a:prstGeom prst="rect">
+            <a:avLst/>
+          </a:prstGeom>
+          <a:noFill/>
+          <a:ln/>
+        </p:spPr>
+        <p:txBody>
+          <a:bodyPr wrap="square" lIns="0" tIns="0" rIns="0" bIns="0" rtlCol="0" anchor="ctr"/>
+          <a:lstStyle/>
+          <a:p>
+            <a:pPr algn="r" indent="0" marL="0">
+              <a:buNone/>
+            </a:pPr>
+            <a:r>
+              <a:rPr lang="en-US" sz="950" dirty="0">
+                <a:solidFill>
+                  <a:srgbClr val="98A2B3"/>
+                </a:solidFill>
+                <a:latin typeface="Microsoft YaHei" pitchFamily="34" charset="0"/>
+                <a:ea typeface="Microsoft YaHei" pitchFamily="34" charset="-122"/>
+                <a:cs typeface="Microsoft YaHei" pitchFamily="34" charset="-120"/>
+              </a:rPr>
+              <a:t>17</a:t>
+            </a:r>
+            <a:endParaRPr lang="en-US" sz="950" dirty="0"/>
+          </a:p>
+        </p:txBody>
+      </p:sp>
+      <p:sp>
+        <p:nvSpPr>
+          <p:cNvPr id="8" name="Text 6"/>
+          <p:cNvSpPr/>
+          <p:nvPr/>
+        </p:nvSpPr>
+        <p:spPr>
+          <a:xfrm>
+            <a:off x="731520" y="1024128"/>
+            <a:ext cx="10881360" cy="347472"/>
+          </a:xfrm>
+          <a:prstGeom prst="rect">
+            <a:avLst/>
+          </a:prstGeom>
+          <a:noFill/>
+          <a:ln/>
+        </p:spPr>
+        <p:txBody>
+          <a:bodyPr wrap="square" lIns="0" tIns="0" rIns="0" bIns="0" rtlCol="0" anchor="ctr"/>
+          <a:lstStyle/>
+          <a:p>
+            <a:pPr indent="0" marL="0">
+              <a:buNone/>
+            </a:pPr>
+            <a:r>
+              <a:rPr lang="en-US" sz="1200" dirty="0">
+                <a:solidFill>
+                  <a:srgbClr val="5B6577"/>
+                </a:solidFill>
+                <a:latin typeface="Microsoft YaHei" pitchFamily="34" charset="0"/>
+                <a:ea typeface="Microsoft YaHei" pitchFamily="34" charset="-122"/>
+                <a:cs typeface="Microsoft YaHei" pitchFamily="34" charset="-120"/>
+              </a:rPr>
+              <a:t>线下集中开发与线上会议并行推进，跨成员的接口与数据对接全部以文档留痕。</a:t>
+            </a:r>
+            <a:endParaRPr lang="en-US" sz="1200" dirty="0"/>
+          </a:p>
+        </p:txBody>
+      </p:sp>
+      <p:sp>
+        <p:nvSpPr>
+          <p:cNvPr id="9" name="Shape 7"/>
+          <p:cNvSpPr/>
+          <p:nvPr/>
+        </p:nvSpPr>
+        <p:spPr>
+          <a:xfrm>
+            <a:off x="731520" y="1481328"/>
+            <a:ext cx="6035040" cy="4709160"/>
+          </a:xfrm>
+          <a:prstGeom prst="roundRect">
+            <a:avLst>
+              <a:gd name="adj" fmla="val 971"/>
+            </a:avLst>
           </a:prstGeom>
           <a:solidFill>
-            <a:srgbClr val="00FFFF"/>
+            <a:srgbClr val="F5F7FB"/>
           </a:solidFill>
-          <a:ln/>
-        </p:spPr>
-      </p:sp>
-      <p:sp>
-        <p:nvSpPr>
-          <p:cNvPr id="5" name="Text 3"/>
-          <p:cNvSpPr/>
-          <p:nvPr/>
-        </p:nvSpPr>
-        <p:spPr>
-          <a:xfrm>
-            <a:off x="822960" y="2286000"/>
-            <a:ext cx="10515600" cy="868680"/>
+          <a:ln w="12700">
+            <a:solidFill>
+              <a:srgbClr val="E4E9F2"/>
+            </a:solidFill>
+            <a:prstDash val="solid"/>
+          </a:ln>
+        </p:spPr>
+      </p:sp>
+      <p:pic>
+        <p:nvPicPr>
+          <p:cNvPr id="10" name="Image 0" descr="D:\外包竞赛\project\ai-interview-system\docs\submission\figures\team\team-会议现场.png">    </p:cNvPr>
+          <p:cNvPicPr>
+            <a:picLocks noChangeAspect="1"/>
+          </p:cNvPicPr>
+          <p:nvPr/>
+        </p:nvPicPr>
+        <p:blipFill>
+          <a:blip r:embed="rId1"/>
+          <a:srcRect l="-18831" r="-18831" t="0" b="0"/>
+          <a:stretch/>
+        </p:blipFill>
+        <p:spPr>
+          <a:xfrm>
+            <a:off x="841248" y="1572768"/>
+            <a:ext cx="5815584" cy="4224528"/>
+          </a:xfrm>
+          <a:prstGeom prst="rect">
+            <a:avLst/>
+          </a:prstGeom>
+        </p:spPr>
+      </p:pic>
+      <p:sp>
+        <p:nvSpPr>
+          <p:cNvPr id="11" name="Text 8"/>
+          <p:cNvSpPr/>
+          <p:nvPr/>
+        </p:nvSpPr>
+        <p:spPr>
+          <a:xfrm>
+            <a:off x="841248" y="5852160"/>
+            <a:ext cx="5815584" cy="274320"/>
           </a:xfrm>
           <a:prstGeom prst="rect">
             <a:avLst/>
@@ -18063,34 +18377,84 @@
           <a:bodyPr wrap="square" lIns="0" tIns="0" rIns="0" bIns="0" rtlCol="0" anchor="ctr"/>
           <a:lstStyle/>
           <a:p>
-            <a:pPr indent="0" marL="0">
-              <a:buNone/>
-            </a:pPr>
-            <a:r>
-              <a:rPr lang="en-US" sz="4000" b="1" dirty="0">
-                <a:solidFill>
-                  <a:srgbClr val="FFFFFF"/>
-                </a:solidFill>
-                <a:latin typeface="Microsoft YaHei" pitchFamily="34" charset="0"/>
-                <a:ea typeface="Microsoft YaHei" pitchFamily="34" charset="-122"/>
-                <a:cs typeface="Microsoft YaHei" pitchFamily="34" charset="-120"/>
-              </a:rPr>
-              <a:t>五个岗位，一条链路</a:t>
-            </a:r>
-            <a:endParaRPr lang="en-US" sz="4000" dirty="0"/>
-          </a:p>
-        </p:txBody>
-      </p:sp>
-      <p:sp>
-        <p:nvSpPr>
-          <p:cNvPr id="6" name="Text 4"/>
-          <p:cNvSpPr/>
-          <p:nvPr/>
-        </p:nvSpPr>
-        <p:spPr>
-          <a:xfrm>
-            <a:off x="868680" y="3310128"/>
-            <a:ext cx="10424160" cy="502920"/>
+            <a:pPr algn="ctr" indent="0" marL="0">
+              <a:buNone/>
+            </a:pPr>
+            <a:r>
+              <a:rPr lang="en-US" sz="1000" dirty="0">
+                <a:solidFill>
+                  <a:srgbClr val="98A2B3"/>
+                </a:solidFill>
+                <a:latin typeface="Microsoft YaHei" pitchFamily="34" charset="0"/>
+                <a:ea typeface="Microsoft YaHei" pitchFamily="34" charset="-122"/>
+                <a:cs typeface="Microsoft YaHei" pitchFamily="34" charset="-120"/>
+              </a:rPr>
+              <a:t>线下集中开发（会议室现场）</a:t>
+            </a:r>
+            <a:endParaRPr lang="en-US" sz="1000" dirty="0"/>
+          </a:p>
+        </p:txBody>
+      </p:sp>
+      <p:sp>
+        <p:nvSpPr>
+          <p:cNvPr id="12" name="Shape 9"/>
+          <p:cNvSpPr/>
+          <p:nvPr/>
+        </p:nvSpPr>
+        <p:spPr>
+          <a:xfrm>
+            <a:off x="6995160" y="1481328"/>
+            <a:ext cx="4434840" cy="2286000"/>
+          </a:xfrm>
+          <a:prstGeom prst="roundRect">
+            <a:avLst>
+              <a:gd name="adj" fmla="val 2000"/>
+            </a:avLst>
+          </a:prstGeom>
+          <a:solidFill>
+            <a:srgbClr val="F5F7FB"/>
+          </a:solidFill>
+          <a:ln w="12700">
+            <a:solidFill>
+              <a:srgbClr val="E4E9F2"/>
+            </a:solidFill>
+            <a:prstDash val="solid"/>
+          </a:ln>
+        </p:spPr>
+      </p:sp>
+      <p:pic>
+        <p:nvPicPr>
+          <p:cNvPr id="13" name="Image 1" descr="D:\外包竞赛\project\ai-interview-system\docs\submission\figures\team\team-腾讯会议.png">    </p:cNvPr>
+          <p:cNvPicPr>
+            <a:picLocks noChangeAspect="1"/>
+          </p:cNvPicPr>
+          <p:nvPr/>
+        </p:nvPicPr>
+        <p:blipFill>
+          <a:blip r:embed="rId2"/>
+          <a:srcRect l="-62439" r="-62439" t="0" b="0"/>
+          <a:stretch/>
+        </p:blipFill>
+        <p:spPr>
+          <a:xfrm>
+            <a:off x="7104888" y="1572768"/>
+            <a:ext cx="4215384" cy="1874520"/>
+          </a:xfrm>
+          <a:prstGeom prst="rect">
+            <a:avLst/>
+          </a:prstGeom>
+        </p:spPr>
+      </p:pic>
+      <p:sp>
+        <p:nvSpPr>
+          <p:cNvPr id="14" name="Text 10"/>
+          <p:cNvSpPr/>
+          <p:nvPr/>
+        </p:nvSpPr>
+        <p:spPr>
+          <a:xfrm>
+            <a:off x="7104888" y="3474720"/>
+            <a:ext cx="4215384" cy="256032"/>
           </a:xfrm>
           <a:prstGeom prst="rect">
             <a:avLst/>
@@ -18102,11 +18466,11 @@
           <a:bodyPr wrap="square" lIns="0" tIns="0" rIns="0" bIns="0" rtlCol="0" anchor="ctr"/>
           <a:lstStyle/>
           <a:p>
-            <a:pPr indent="0" marL="0">
-              <a:buNone/>
-            </a:pPr>
-            <a:r>
-              <a:rPr lang="en-US" sz="1450" dirty="0">
+            <a:pPr algn="ctr" indent="0" marL="0">
+              <a:buNone/>
+            </a:pPr>
+            <a:r>
+              <a:rPr lang="en-US" sz="1000" dirty="0">
                 <a:solidFill>
                   <a:srgbClr val="98A2B3"/>
                 </a:solidFill>
@@ -18114,22 +18478,72 @@
                 <a:ea typeface="Microsoft YaHei" pitchFamily="34" charset="-122"/>
                 <a:cs typeface="Microsoft YaHei" pitchFamily="34" charset="-120"/>
               </a:rPr>
-              <a:t>从题库生产到多模态面试，从五维评分到成长追踪，每一段都有明确的所有者与可核查的产出。</a:t>
-            </a:r>
-            <a:endParaRPr lang="en-US" sz="1450" dirty="0"/>
-          </a:p>
-        </p:txBody>
-      </p:sp>
-      <p:sp>
-        <p:nvSpPr>
-          <p:cNvPr id="7" name="Text 5"/>
-          <p:cNvSpPr/>
-          <p:nvPr/>
-        </p:nvSpPr>
-        <p:spPr>
-          <a:xfrm>
-            <a:off x="868680" y="4846320"/>
-            <a:ext cx="10424160" cy="457200"/>
+              <a:t>线上会议对接（腾讯会议）</a:t>
+            </a:r>
+            <a:endParaRPr lang="en-US" sz="1000" dirty="0"/>
+          </a:p>
+        </p:txBody>
+      </p:sp>
+      <p:sp>
+        <p:nvSpPr>
+          <p:cNvPr id="15" name="Shape 11"/>
+          <p:cNvSpPr/>
+          <p:nvPr/>
+        </p:nvSpPr>
+        <p:spPr>
+          <a:xfrm>
+            <a:off x="6995160" y="3904488"/>
+            <a:ext cx="4434840" cy="2286000"/>
+          </a:xfrm>
+          <a:prstGeom prst="roundRect">
+            <a:avLst>
+              <a:gd name="adj" fmla="val 2000"/>
+            </a:avLst>
+          </a:prstGeom>
+          <a:solidFill>
+            <a:srgbClr val="F5F7FB"/>
+          </a:solidFill>
+          <a:ln w="12700">
+            <a:solidFill>
+              <a:srgbClr val="E4E9F2"/>
+            </a:solidFill>
+            <a:prstDash val="solid"/>
+          </a:ln>
+        </p:spPr>
+      </p:sp>
+      <p:pic>
+        <p:nvPicPr>
+          <p:cNvPr id="16" name="Image 2" descr="D:\外包竞赛\project\ai-interview-system\docs\submission\figures\team\team-对接文档核对.png">    </p:cNvPr>
+          <p:cNvPicPr>
+            <a:picLocks noChangeAspect="1"/>
+          </p:cNvPicPr>
+          <p:nvPr/>
+        </p:nvPicPr>
+        <p:blipFill>
+          <a:blip r:embed="rId3"/>
+          <a:srcRect l="-62439" r="-62439" t="0" b="0"/>
+          <a:stretch/>
+        </p:blipFill>
+        <p:spPr>
+          <a:xfrm>
+            <a:off x="7104888" y="3995928"/>
+            <a:ext cx="4215384" cy="1874520"/>
+          </a:xfrm>
+          <a:prstGeom prst="rect">
+            <a:avLst/>
+          </a:prstGeom>
+        </p:spPr>
+      </p:pic>
+      <p:sp>
+        <p:nvSpPr>
+          <p:cNvPr id="17" name="Text 12"/>
+          <p:cNvSpPr/>
+          <p:nvPr/>
+        </p:nvSpPr>
+        <p:spPr>
+          <a:xfrm>
+            <a:off x="7104888" y="5897880"/>
+            <a:ext cx="4215384" cy="256032"/>
           </a:xfrm>
           <a:prstGeom prst="rect">
             <a:avLst/>
@@ -18141,21 +18555,21 @@
           <a:bodyPr wrap="square" lIns="0" tIns="0" rIns="0" bIns="0" rtlCol="0" anchor="ctr"/>
           <a:lstStyle/>
           <a:p>
-            <a:pPr indent="0" marL="0">
-              <a:buNone/>
-            </a:pPr>
-            <a:r>
-              <a:rPr lang="en-US" sz="1500" dirty="0">
-                <a:solidFill>
-                  <a:srgbClr val="00FFFF"/>
-                </a:solidFill>
-                <a:latin typeface="Microsoft YaHei" pitchFamily="34" charset="0"/>
-                <a:ea typeface="Microsoft YaHei" pitchFamily="34" charset="-122"/>
-                <a:cs typeface="Microsoft YaHei" pitchFamily="34" charset="-120"/>
-              </a:rPr>
-              <a:t>深镜智聘｜Alpha 小队</a:t>
-            </a:r>
-            <a:endParaRPr lang="en-US" sz="1500" dirty="0"/>
+            <a:pPr algn="ctr" indent="0" marL="0">
+              <a:buNone/>
+            </a:pPr>
+            <a:r>
+              <a:rPr lang="en-US" sz="1000" dirty="0">
+                <a:solidFill>
+                  <a:srgbClr val="98A2B3"/>
+                </a:solidFill>
+                <a:latin typeface="Microsoft YaHei" pitchFamily="34" charset="0"/>
+                <a:ea typeface="Microsoft YaHei" pitchFamily="34" charset="-122"/>
+                <a:cs typeface="Microsoft YaHei" pitchFamily="34" charset="-120"/>
+              </a:rPr>
+              <a:t>跨成员对接文档（接口核对）</a:t>
+            </a:r>
+            <a:endParaRPr lang="en-US" sz="1000" dirty="0"/>
           </a:p>
         </p:txBody>
       </p:sp>
@@ -18876,6 +19290,215 @@
               <a:t>阶段任务与人员分工</a:t>
             </a:r>
             <a:endParaRPr lang="en-US" sz="1350" dirty="0"/>
+          </a:p>
+        </p:txBody>
+      </p:sp>
+    </p:spTree>
+  </p:cSld>
+  <p:clrMapOvr>
+    <a:masterClrMapping/>
+  </p:clrMapOvr>
+</p:sld>
+</file>
+
+<file path=ppt/slides/slide20.xml><?xml version="1.0" encoding="utf-8"?>
+<p:sld xmlns:a="http://schemas.openxmlformats.org/drawingml/2006/main" xmlns:r="http://schemas.openxmlformats.org/officeDocument/2006/relationships" xmlns:p="http://schemas.openxmlformats.org/presentationml/2006/main">
+  <p:cSld name="Slide 20">
+    <p:bg>
+      <p:bgPr>
+        <a:solidFill>
+          <a:srgbClr val="1E1E1E"/>
+        </a:solidFill>
+      </p:bgPr>
+    </p:bg>
+    <p:spTree>
+      <p:nvGrpSpPr>
+        <p:cNvPr id="1" name=""/>
+        <p:cNvGrpSpPr/>
+        <p:nvPr/>
+      </p:nvGrpSpPr>
+      <p:grpSpPr>
+        <a:xfrm>
+          <a:off x="0" y="0"/>
+          <a:ext cx="0" cy="0"/>
+          <a:chOff x="0" y="0"/>
+          <a:chExt cx="0" cy="0"/>
+        </a:xfrm>
+      </p:grpSpPr>
+      <p:sp>
+        <p:nvSpPr>
+          <p:cNvPr id="2" name="Shape 0"/>
+          <p:cNvSpPr/>
+          <p:nvPr/>
+        </p:nvSpPr>
+        <p:spPr>
+          <a:xfrm>
+            <a:off x="0" y="3410712"/>
+            <a:ext cx="12191695" cy="36576"/>
+          </a:xfrm>
+          <a:prstGeom prst="rect">
+            <a:avLst/>
+          </a:prstGeom>
+          <a:solidFill>
+            <a:srgbClr val="2B2F36"/>
+          </a:solidFill>
+          <a:ln/>
+        </p:spPr>
+      </p:sp>
+      <p:sp>
+        <p:nvSpPr>
+          <p:cNvPr id="3" name="Shape 1"/>
+          <p:cNvSpPr/>
+          <p:nvPr/>
+        </p:nvSpPr>
+        <p:spPr>
+          <a:xfrm>
+            <a:off x="822960" y="1965960"/>
+            <a:ext cx="777240" cy="82296"/>
+          </a:xfrm>
+          <a:prstGeom prst="rect">
+            <a:avLst/>
+          </a:prstGeom>
+          <a:solidFill>
+            <a:srgbClr val="0066FF"/>
+          </a:solidFill>
+          <a:ln/>
+        </p:spPr>
+      </p:sp>
+      <p:sp>
+        <p:nvSpPr>
+          <p:cNvPr id="4" name="Shape 2"/>
+          <p:cNvSpPr/>
+          <p:nvPr/>
+        </p:nvSpPr>
+        <p:spPr>
+          <a:xfrm>
+            <a:off x="1737360" y="1965960"/>
+            <a:ext cx="457200" cy="82296"/>
+          </a:xfrm>
+          <a:prstGeom prst="rect">
+            <a:avLst/>
+          </a:prstGeom>
+          <a:solidFill>
+            <a:srgbClr val="00FFFF"/>
+          </a:solidFill>
+          <a:ln/>
+        </p:spPr>
+      </p:sp>
+      <p:sp>
+        <p:nvSpPr>
+          <p:cNvPr id="5" name="Text 3"/>
+          <p:cNvSpPr/>
+          <p:nvPr/>
+        </p:nvSpPr>
+        <p:spPr>
+          <a:xfrm>
+            <a:off x="822960" y="2286000"/>
+            <a:ext cx="10515600" cy="868680"/>
+          </a:xfrm>
+          <a:prstGeom prst="rect">
+            <a:avLst/>
+          </a:prstGeom>
+          <a:noFill/>
+          <a:ln/>
+        </p:spPr>
+        <p:txBody>
+          <a:bodyPr wrap="square" lIns="0" tIns="0" rIns="0" bIns="0" rtlCol="0" anchor="ctr"/>
+          <a:lstStyle/>
+          <a:p>
+            <a:pPr indent="0" marL="0">
+              <a:buNone/>
+            </a:pPr>
+            <a:r>
+              <a:rPr lang="en-US" sz="4000" b="1" dirty="0">
+                <a:solidFill>
+                  <a:srgbClr val="FFFFFF"/>
+                </a:solidFill>
+                <a:latin typeface="Microsoft YaHei" pitchFamily="34" charset="0"/>
+                <a:ea typeface="Microsoft YaHei" pitchFamily="34" charset="-122"/>
+                <a:cs typeface="Microsoft YaHei" pitchFamily="34" charset="-120"/>
+              </a:rPr>
+              <a:t>五个岗位，一条链路</a:t>
+            </a:r>
+            <a:endParaRPr lang="en-US" sz="4000" dirty="0"/>
+          </a:p>
+        </p:txBody>
+      </p:sp>
+      <p:sp>
+        <p:nvSpPr>
+          <p:cNvPr id="6" name="Text 4"/>
+          <p:cNvSpPr/>
+          <p:nvPr/>
+        </p:nvSpPr>
+        <p:spPr>
+          <a:xfrm>
+            <a:off x="868680" y="3310128"/>
+            <a:ext cx="10424160" cy="502920"/>
+          </a:xfrm>
+          <a:prstGeom prst="rect">
+            <a:avLst/>
+          </a:prstGeom>
+          <a:noFill/>
+          <a:ln/>
+        </p:spPr>
+        <p:txBody>
+          <a:bodyPr wrap="square" lIns="0" tIns="0" rIns="0" bIns="0" rtlCol="0" anchor="ctr"/>
+          <a:lstStyle/>
+          <a:p>
+            <a:pPr indent="0" marL="0">
+              <a:buNone/>
+            </a:pPr>
+            <a:r>
+              <a:rPr lang="en-US" sz="1450" dirty="0">
+                <a:solidFill>
+                  <a:srgbClr val="98A2B3"/>
+                </a:solidFill>
+                <a:latin typeface="Microsoft YaHei" pitchFamily="34" charset="0"/>
+                <a:ea typeface="Microsoft YaHei" pitchFamily="34" charset="-122"/>
+                <a:cs typeface="Microsoft YaHei" pitchFamily="34" charset="-120"/>
+              </a:rPr>
+              <a:t>从题库生产到多模态面试，从五维评分到成长追踪，每一段都有明确的所有者与可核查的产出。</a:t>
+            </a:r>
+            <a:endParaRPr lang="en-US" sz="1450" dirty="0"/>
+          </a:p>
+        </p:txBody>
+      </p:sp>
+      <p:sp>
+        <p:nvSpPr>
+          <p:cNvPr id="7" name="Text 5"/>
+          <p:cNvSpPr/>
+          <p:nvPr/>
+        </p:nvSpPr>
+        <p:spPr>
+          <a:xfrm>
+            <a:off x="868680" y="4846320"/>
+            <a:ext cx="10424160" cy="457200"/>
+          </a:xfrm>
+          <a:prstGeom prst="rect">
+            <a:avLst/>
+          </a:prstGeom>
+          <a:noFill/>
+          <a:ln/>
+        </p:spPr>
+        <p:txBody>
+          <a:bodyPr wrap="square" lIns="0" tIns="0" rIns="0" bIns="0" rtlCol="0" anchor="ctr"/>
+          <a:lstStyle/>
+          <a:p>
+            <a:pPr indent="0" marL="0">
+              <a:buNone/>
+            </a:pPr>
+            <a:r>
+              <a:rPr lang="en-US" sz="1500" dirty="0">
+                <a:solidFill>
+                  <a:srgbClr val="00FFFF"/>
+                </a:solidFill>
+                <a:latin typeface="Microsoft YaHei" pitchFamily="34" charset="0"/>
+                <a:ea typeface="Microsoft YaHei" pitchFamily="34" charset="-122"/>
+                <a:cs typeface="Microsoft YaHei" pitchFamily="34" charset="-120"/>
+              </a:rPr>
+              <a:t>深镜智聘｜Alpha 小队</a:t>
+            </a:r>
+            <a:endParaRPr lang="en-US" sz="1500" dirty="0"/>
           </a:p>
         </p:txBody>
       </p:sp>
@@ -20894,7 +21517,7 @@
                           <a:ea typeface="Microsoft YaHei" pitchFamily="34" charset="-122"/>
                           <a:cs typeface="Microsoft YaHei" pitchFamily="34" charset="-120"/>
                         </a:rPr>
-                        <a:t>后端开发 A</a:t>
+                        <a:t>后端开发 A · 小丁</a:t>
                       </a:r>
                       <a:endParaRPr lang="en-US" sz="1100" dirty="0">
                         <a:latin typeface="Microsoft YaHei" charset="0"/>
@@ -21100,7 +21723,7 @@
                           <a:ea typeface="Microsoft YaHei" pitchFamily="34" charset="-122"/>
                           <a:cs typeface="Microsoft YaHei" pitchFamily="34" charset="-120"/>
                         </a:rPr>
-                        <a:t>AI 对话层与面试官人格</a:t>
+                        <a:t>AI 对话层与面试官人格 · 小陈</a:t>
                       </a:r>
                       <a:endParaRPr lang="en-US" sz="1100" dirty="0">
                         <a:latin typeface="Microsoft YaHei" charset="0"/>
@@ -21306,7 +21929,7 @@
                           <a:ea typeface="Microsoft YaHei" pitchFamily="34" charset="-122"/>
                           <a:cs typeface="Microsoft YaHei" pitchFamily="34" charset="-120"/>
                         </a:rPr>
-                        <a:t>AI 评估与报告生成</a:t>
+                        <a:t>AI 评估与报告生成 · 小黄</a:t>
                       </a:r>
                       <a:endParaRPr lang="en-US" sz="1100" dirty="0">
                         <a:latin typeface="Microsoft YaHei" charset="0"/>
@@ -21512,7 +22135,7 @@
                           <a:ea typeface="Microsoft YaHei" pitchFamily="34" charset="-122"/>
                           <a:cs typeface="Microsoft YaHei" pitchFamily="34" charset="-120"/>
                         </a:rPr>
-                        <a:t>前端全栈开发</a:t>
+                        <a:t>前端全栈开发 · 小冯</a:t>
                       </a:r>
                       <a:endParaRPr lang="en-US" sz="1100" dirty="0">
                         <a:latin typeface="Microsoft YaHei" charset="0"/>
@@ -21718,7 +22341,7 @@
                           <a:ea typeface="Microsoft YaHei" pitchFamily="34" charset="-122"/>
                           <a:cs typeface="Microsoft YaHei" pitchFamily="34" charset="-120"/>
                         </a:rPr>
-                        <a:t>知识库构建与测试</a:t>
+                        <a:t>知识库构建与测试 · 小李</a:t>
                       </a:r>
                       <a:endParaRPr lang="en-US" sz="1100" dirty="0">
                         <a:latin typeface="Microsoft YaHei" charset="0"/>

--- a/docs/submission/05-项目的详细分工及过程-演示稿.pptx
+++ b/docs/submission/05-项目的详细分工及过程-演示稿.pptx
@@ -25601,7 +25601,7 @@
                 <a:ea typeface="Microsoft YaHei" pitchFamily="34" charset="-122"/>
                 <a:cs typeface="Microsoft YaHei" pitchFamily="34" charset="-120"/>
               </a:rPr>
-              <a:t>Vue 3 + Vite + TypeScript，14 个页面 + 1 个设置组件，桌面与移动端响应式；以下为实际交付界面的部分截图。</a:t>
+              <a:t>Vue 3 + Vite，14 个页面 + 1 个设置组件，桌面与移动端响应式；以下为实际交付界面的部分截图。</a:t>
             </a:r>
             <a:endParaRPr lang="en-US" sz="1200" dirty="0"/>
           </a:p>

--- a/docs/submission/05-项目的详细分工及过程-演示稿.pptx
+++ b/docs/submission/05-项目的详细分工及过程-演示稿.pptx
@@ -3531,14 +3531,13 @@
             <a:tbl>
               <a:tblPr/>
               <a:tblGrid>
-                <a:gridCol w="2011680"/>
-                <a:gridCol w="2011680"/>
-                <a:gridCol w="2011680"/>
-                <a:gridCol w="2011680"/>
-                <a:gridCol w="1600200"/>
-                <a:gridCol w="1188720"/>
+                <a:gridCol w="2167128"/>
+                <a:gridCol w="2167128"/>
+                <a:gridCol w="2167128"/>
+                <a:gridCol w="2167128"/>
+                <a:gridCol w="2167128"/>
               </a:tblGrid>
-              <a:tr h="384048">
+              <a:tr h="475488">
                 <a:tc>
                   <a:txBody>
                     <a:bodyPr/>
@@ -3557,74 +3556,6 @@
                           <a:cs typeface="Microsoft YaHei" pitchFamily="34" charset="-120"/>
                         </a:rPr>
                         <a:t>8001 主后端</a:t>
-                      </a:r>
-                      <a:endParaRPr lang="en-US" sz="1050" dirty="0">
-                        <a:latin typeface="Microsoft YaHei" charset="0"/>
-                        <a:ea typeface="Microsoft YaHei" charset="0"/>
-                        <a:cs typeface="Microsoft YaHei" charset="0"/>
-                      </a:endParaRPr>
-                    </a:p>
-                  </a:txBody>
-                  <a:tcPr marL="54864" marR="54864" marT="54864" marB="54864" anchor="ctr">
-                    <a:lnL w="9525" cap="flat" cmpd="sng" algn="ctr">
-                      <a:solidFill>
-                        <a:srgbClr val="E4E9F2"/>
-                      </a:solidFill>
-                      <a:prstDash val="solid"/>
-                      <a:round/>
-                      <a:headEnd type="none" w="med" len="med"/>
-                      <a:tailEnd type="none" w="med" len="med"/>
-                    </a:lnL>
-                    <a:lnR w="9525" cap="flat" cmpd="sng" algn="ctr">
-                      <a:solidFill>
-                        <a:srgbClr val="E4E9F2"/>
-                      </a:solidFill>
-                      <a:prstDash val="solid"/>
-                      <a:round/>
-                      <a:headEnd type="none" w="med" len="med"/>
-                      <a:tailEnd type="none" w="med" len="med"/>
-                    </a:lnR>
-                    <a:lnT w="9525" cap="flat" cmpd="sng" algn="ctr">
-                      <a:solidFill>
-                        <a:srgbClr val="E4E9F2"/>
-                      </a:solidFill>
-                      <a:prstDash val="solid"/>
-                      <a:round/>
-                      <a:headEnd type="none" w="med" len="med"/>
-                      <a:tailEnd type="none" w="med" len="med"/>
-                    </a:lnT>
-                    <a:lnB w="9525" cap="flat" cmpd="sng" algn="ctr">
-                      <a:solidFill>
-                        <a:srgbClr val="E4E9F2"/>
-                      </a:solidFill>
-                      <a:prstDash val="solid"/>
-                      <a:round/>
-                      <a:headEnd type="none" w="med" len="med"/>
-                      <a:tailEnd type="none" w="med" len="med"/>
-                    </a:lnB>
-                    <a:solidFill>
-                      <a:srgbClr val="0066FF"/>
-                    </a:solidFill>
-                  </a:tcPr>
-                </a:tc>
-                <a:tc>
-                  <a:txBody>
-                    <a:bodyPr/>
-                    <a:lstStyle/>
-                    <a:p>
-                      <a:pPr algn="ctr" indent="0" marL="0">
-                        <a:buNone/>
-                      </a:pPr>
-                      <a:r>
-                        <a:rPr lang="en-US" sz="1050" b="1" dirty="0">
-                          <a:solidFill>
-                            <a:srgbClr val="FFFFFF"/>
-                          </a:solidFill>
-                          <a:latin typeface="Microsoft YaHei" pitchFamily="34" charset="0"/>
-                          <a:ea typeface="Microsoft YaHei" pitchFamily="34" charset="-122"/>
-                          <a:cs typeface="Microsoft YaHei" pitchFamily="34" charset="-120"/>
-                        </a:rPr>
-                        <a:t>8002 评估服务</a:t>
                       </a:r>
                       <a:endParaRPr lang="en-US" sz="1050" dirty="0">
                         <a:latin typeface="Microsoft YaHei" charset="0"/>
@@ -3948,7 +3879,7 @@
                   </a:tcPr>
                 </a:tc>
               </a:tr>
-              <a:tr h="384048">
+              <a:tr h="475488">
                 <a:tc>
                   <a:txBody>
                     <a:bodyPr/>
@@ -3967,71 +3898,6 @@
                           <a:cs typeface="Microsoft YaHei" pitchFamily="34" charset="-120"/>
                         </a:rPr>
                         <a:t>后端开发 A</a:t>
-                      </a:r>
-                      <a:endParaRPr lang="en-US" sz="1050" dirty="0">
-                        <a:latin typeface="Microsoft YaHei" charset="0"/>
-                        <a:ea typeface="Microsoft YaHei" charset="0"/>
-                        <a:cs typeface="Microsoft YaHei" charset="0"/>
-                      </a:endParaRPr>
-                    </a:p>
-                  </a:txBody>
-                  <a:tcPr marL="54864" marR="54864" marT="54864" marB="54864" anchor="ctr">
-                    <a:lnL w="9525" cap="flat" cmpd="sng" algn="ctr">
-                      <a:solidFill>
-                        <a:srgbClr val="E4E9F2"/>
-                      </a:solidFill>
-                      <a:prstDash val="solid"/>
-                      <a:round/>
-                      <a:headEnd type="none" w="med" len="med"/>
-                      <a:tailEnd type="none" w="med" len="med"/>
-                    </a:lnL>
-                    <a:lnR w="9525" cap="flat" cmpd="sng" algn="ctr">
-                      <a:solidFill>
-                        <a:srgbClr val="E4E9F2"/>
-                      </a:solidFill>
-                      <a:prstDash val="solid"/>
-                      <a:round/>
-                      <a:headEnd type="none" w="med" len="med"/>
-                      <a:tailEnd type="none" w="med" len="med"/>
-                    </a:lnR>
-                    <a:lnT w="9525" cap="flat" cmpd="sng" algn="ctr">
-                      <a:solidFill>
-                        <a:srgbClr val="E4E9F2"/>
-                      </a:solidFill>
-                      <a:prstDash val="solid"/>
-                      <a:round/>
-                      <a:headEnd type="none" w="med" len="med"/>
-                      <a:tailEnd type="none" w="med" len="med"/>
-                    </a:lnT>
-                    <a:lnB w="9525" cap="flat" cmpd="sng" algn="ctr">
-                      <a:solidFill>
-                        <a:srgbClr val="E4E9F2"/>
-                      </a:solidFill>
-                      <a:prstDash val="solid"/>
-                      <a:round/>
-                      <a:headEnd type="none" w="med" len="med"/>
-                      <a:tailEnd type="none" w="med" len="med"/>
-                    </a:lnB>
-                  </a:tcPr>
-                </a:tc>
-                <a:tc>
-                  <a:txBody>
-                    <a:bodyPr/>
-                    <a:lstStyle/>
-                    <a:p>
-                      <a:pPr algn="ctr" indent="0" marL="0">
-                        <a:buNone/>
-                      </a:pPr>
-                      <a:r>
-                        <a:rPr lang="en-US" sz="1050" dirty="0">
-                          <a:solidFill>
-                            <a:srgbClr val="5B6577"/>
-                          </a:solidFill>
-                          <a:latin typeface="Microsoft YaHei" pitchFamily="34" charset="0"/>
-                          <a:ea typeface="Microsoft YaHei" pitchFamily="34" charset="-122"/>
-                          <a:cs typeface="Microsoft YaHei" pitchFamily="34" charset="-120"/>
-                        </a:rPr>
-                        <a:t>AI 评估与报告生成</a:t>
                       </a:r>
                       <a:endParaRPr lang="en-US" sz="1050" dirty="0">
                         <a:latin typeface="Microsoft YaHei" charset="0"/>
@@ -4162,6 +4028,27 @@
                           <a:cs typeface="Microsoft YaHei" pitchFamily="34" charset="-120"/>
                         </a:rPr>
                         <a:t>AI 对话层与面试官人格</a:t>
+                      </a:r>
+                      <a:endParaRPr lang="en-US" sz="1050" dirty="0">
+                        <a:latin typeface="Microsoft YaHei" charset="0"/>
+                        <a:ea typeface="Microsoft YaHei" charset="0"/>
+                        <a:cs typeface="Microsoft YaHei" charset="0"/>
+                      </a:endParaRPr>
+                    </a:p>
+                    <a:p>
+                      <a:pPr algn="ctr" indent="0" marL="0">
+                        <a:buNone/>
+                      </a:pPr>
+                      <a:r>
+                        <a:rPr lang="en-US" sz="1050" dirty="0">
+                          <a:solidFill>
+                            <a:srgbClr val="5B6577"/>
+                          </a:solidFill>
+                          <a:latin typeface="Microsoft YaHei" pitchFamily="34" charset="0"/>
+                          <a:ea typeface="Microsoft YaHei" pitchFamily="34" charset="-122"/>
+                          <a:cs typeface="Microsoft YaHei" pitchFamily="34" charset="-120"/>
+                        </a:rPr>
+                        <a:t>AI 评估与报告生成</a:t>
                       </a:r>
                       <a:endParaRPr lang="en-US" sz="1050" dirty="0">
                         <a:latin typeface="Microsoft YaHei" charset="0"/>

--- a/docs/submission/05-项目的详细分工及过程-演示稿.pptx
+++ b/docs/submission/05-项目的详细分工及过程-演示稿.pptx
@@ -13291,7 +13291,7 @@
                           <a:ea typeface="Microsoft YaHei" pitchFamily="34" charset="-122"/>
                           <a:cs typeface="Microsoft YaHei" pitchFamily="34" charset="-120"/>
                         </a:rPr>
-                        <a:t>评估服务</a:t>
+                        <a:t>整合进 8005 服务</a:t>
                       </a:r>
                       <a:endParaRPr lang="en-US" sz="950" dirty="0">
                         <a:latin typeface="Microsoft YaHei" charset="0"/>
@@ -13412,7 +13412,7 @@
                           <a:ea typeface="Microsoft YaHei" pitchFamily="34" charset="-122"/>
                           <a:cs typeface="Microsoft YaHei" pitchFamily="34" charset="-120"/>
                         </a:rPr>
-                        <a:t>题库与面试官算法</a:t>
+                        <a:t>面试官对话层与算法</a:t>
                       </a:r>
                       <a:endParaRPr lang="en-US" sz="950" dirty="0">
                         <a:latin typeface="Microsoft YaHei" charset="0"/>
@@ -13477,7 +13477,7 @@
                           <a:ea typeface="Microsoft YaHei" pitchFamily="34" charset="-122"/>
                           <a:cs typeface="Microsoft YaHei" pitchFamily="34" charset="-120"/>
                         </a:rPr>
-                        <a:t>题库入库与算法原生接入</a:t>
+                        <a:t>面试官人格与追问策略、图谱与检索接入；题库入库由小李负责</a:t>
                       </a:r>
                       <a:endParaRPr lang="en-US" sz="950" dirty="0">
                         <a:latin typeface="Microsoft YaHei" charset="0"/>
@@ -13607,7 +13607,7 @@
                           <a:ea typeface="Microsoft YaHei" pitchFamily="34" charset="-122"/>
                           <a:cs typeface="Microsoft YaHei" pitchFamily="34" charset="-120"/>
                         </a:rPr>
-                        <a:t>小李、小陈</a:t>
+                        <a:t>小陈、小李</a:t>
                       </a:r>
                       <a:endParaRPr lang="en-US" sz="950" dirty="0">
                         <a:latin typeface="Microsoft YaHei" charset="0"/>
@@ -13672,7 +13672,7 @@
                           <a:ea typeface="Microsoft YaHei" pitchFamily="34" charset="-122"/>
                           <a:cs typeface="Microsoft YaHei" pitchFamily="34" charset="-120"/>
                         </a:rPr>
-                        <a:t>题库、算法模块</a:t>
+                        <a:t>对话层服务（8005）</a:t>
                       </a:r>
                       <a:endParaRPr lang="en-US" sz="950" dirty="0">
                         <a:latin typeface="Microsoft YaHei" charset="0"/>
@@ -16104,7 +16104,7 @@
                           <a:ea typeface="Microsoft YaHei" pitchFamily="34" charset="-122"/>
                           <a:cs typeface="Microsoft YaHei" pitchFamily="34" charset="-120"/>
                         </a:rPr>
-                        <a:t>三版迭代、语音转写、成长档案、考后复盘</a:t>
+                        <a:t>三版迭代、成长档案聚合接口、考后复盘；语音转写由小黄、小冯主责</a:t>
                       </a:r>
                       <a:endParaRPr lang="en-US" sz="950" dirty="0">
                         <a:latin typeface="Microsoft YaHei" charset="0"/>
@@ -16877,7 +16877,7 @@
                           <a:ea typeface="Microsoft YaHei" pitchFamily="34" charset="-122"/>
                           <a:cs typeface="Microsoft YaHei" pitchFamily="34" charset="-120"/>
                         </a:rPr>
-                        <a:t>180 项自动化用例、全岗位流程仿真</a:t>
+                        <a:t>180 项自动化用例、全岗位流程仿真；小陈参与对话层适配器测试</a:t>
                       </a:r>
                       <a:endParaRPr lang="en-US" sz="950" dirty="0">
                         <a:latin typeface="Microsoft YaHei" charset="0"/>
@@ -21540,7 +21540,7 @@
                           <a:ea typeface="Microsoft YaHei" pitchFamily="34" charset="-122"/>
                           <a:cs typeface="Microsoft YaHei" pitchFamily="34" charset="-120"/>
                         </a:rPr>
-                        <a:t>数据模型与接口体系、面试流程编排、AI 能力接入与降级、部署与一键启动</a:t>
+                        <a:t>主后端与面试流程引擎、接口体系、部署与一键启动、接口文档</a:t>
                       </a:r>
                       <a:endParaRPr lang="en-US" sz="1100" dirty="0">
                         <a:latin typeface="Microsoft YaHei" charset="0"/>
@@ -21746,7 +21746,7 @@
                           <a:ea typeface="Microsoft YaHei" pitchFamily="34" charset="-122"/>
                           <a:cs typeface="Microsoft YaHei" pitchFamily="34" charset="-120"/>
                         </a:rPr>
-                        <a:t>面试官人格提示词、动态追问逻辑与节奏控制、知识图谱与检索接入、语音转写与成长档案</a:t>
+                        <a:t>面试官人格与追问策略、对话层服务、成长档案与考后复盘</a:t>
                       </a:r>
                       <a:endParaRPr lang="en-US" sz="1100" dirty="0">
                         <a:latin typeface="Microsoft YaHei" charset="0"/>
@@ -21952,7 +21952,7 @@
                           <a:ea typeface="Microsoft YaHei" pitchFamily="34" charset="-122"/>
                           <a:cs typeface="Microsoft YaHei" pitchFamily="34" charset="-120"/>
                         </a:rPr>
-                        <a:t>五维评分提示词、按题校准、语音指标分析、报告文本生成、项目文档统筹</a:t>
+                        <a:t>五维评分与报告生成、按题校准、项目文档统筹</a:t>
                       </a:r>
                       <a:endParaRPr lang="en-US" sz="1100" dirty="0">
                         <a:latin typeface="Microsoft YaHei" charset="0"/>
@@ -22158,7 +22158,7 @@
                           <a:ea typeface="Microsoft YaHei" pitchFamily="34" charset="-122"/>
                           <a:cs typeface="Microsoft YaHei" pitchFamily="34" charset="-120"/>
                         </a:rPr>
-                        <a:t>14 个页面与 1 个设置组件的交互实现、语音录制与播放、报告可视化、构建产物交付</a:t>
+                        <a:t>14 个页面与 1 个设置组件的实现、构建产物交付</a:t>
                       </a:r>
                       <a:endParaRPr lang="en-US" sz="1100" dirty="0">
                         <a:latin typeface="Microsoft YaHei" charset="0"/>
@@ -22364,7 +22364,7 @@
                           <a:ea typeface="Microsoft YaHei" pitchFamily="34" charset="-122"/>
                           <a:cs typeface="Microsoft YaHei" pitchFamily="34" charset="-120"/>
                         </a:rPr>
-                        <a:t>5012 题题库生产与导入、74011 条向量检索服务、RAG 检索接口、全流程功能测试</a:t>
+                        <a:t>5012 题题库建设、向量检索服务、全流程功能测试</a:t>
                       </a:r>
                       <a:endParaRPr lang="en-US" sz="1100" dirty="0">
                         <a:latin typeface="Microsoft YaHei" charset="0"/>
@@ -26632,7 +26632,7 @@
                 <a:ea typeface="Microsoft YaHei" pitchFamily="34" charset="-122"/>
                 <a:cs typeface="Microsoft YaHei" pitchFamily="34" charset="-120"/>
               </a:rPr>
-              <a:t>另有 169 项单元与接口测试</a:t>
+              <a:t>另有 180 项单元与接口测试</a:t>
             </a:r>
             <a:endParaRPr lang="en-US" sz="1000" dirty="0"/>
           </a:p>

--- a/docs/submission/05-项目的详细分工及过程-演示稿.pptx
+++ b/docs/submission/05-项目的详细分工及过程-演示稿.pptx
@@ -19860,7 +19860,7 @@
                 <a:ea typeface="Microsoft YaHei" pitchFamily="34" charset="-122"/>
                 <a:cs typeface="Microsoft YaHei" pitchFamily="34" charset="-120"/>
               </a:rPr>
-              <a:t>74011</a:t>
+              <a:t>76222</a:t>
             </a:r>
             <a:endParaRPr lang="en-US" sz="3000" dirty="0"/>
           </a:p>
@@ -26410,7 +26410,7 @@
                 <a:ea typeface="Microsoft YaHei" pitchFamily="34" charset="-122"/>
                 <a:cs typeface="Microsoft YaHei" pitchFamily="34" charset="-120"/>
               </a:rPr>
-              <a:t>74011</a:t>
+              <a:t>76222</a:t>
             </a:r>
             <a:endParaRPr lang="en-US" sz="3000" dirty="0"/>
           </a:p>
